--- a/classes/parte-3-hacking-etico-y-pentesting-metodologia/071-analisis-de-vulnerabilidades-con-nessus-y-openvas/clase-071-presentacion.pptx
+++ b/classes/parte-3-hacking-etico-y-pentesting-metodologia/071-analisis-de-vulnerabilidades-con-nessus-y-openvas/clase-071-presentacion.pptx
@@ -17,6 +17,9 @@
     <p:sldId id="265" r:id="rId16"/>
     <p:sldId id="266" r:id="rId17"/>
     <p:sldId id="267" r:id="rId18"/>
+    <p:sldId id="268" r:id="rId19"/>
+    <p:sldId id="269" r:id="rId20"/>
+    <p:sldId id="270" r:id="rId21"/>
   </p:sldIdLst>
   <p:sldSz cx="9144000" cy="6858000" type="screen4x3"/>
   <p:notesSz cx="6858000" cy="9144000"/>
@@ -3198,7 +3201,7 @@
                   <a:srgbClr val="0B3D2E"/>
                 </a:solidFill>
               </a:rPr>
-              <a:t>⚠️ Errores comunes</a:t>
+              <a:t>✍️ Ejercicios</a:t>
             </a:r>
           </a:p>
         </p:txBody>
@@ -3236,82 +3239,82 @@
                   <a:srgbClr val="22282E"/>
                 </a:solidFill>
               </a:rPr>
-              <a:t>•  Nessus queda en "Activating..." indefinidamente — Falta conexión a internet para validar el activation code la primera vez; verificar DNS/proxy y reintentar</a:t>
-            </a:r>
-          </a:p>
-          <a:p>
-            <a:pPr>
-              <a:spcAft>
-                <a:spcPts val="600"/>
-              </a:spcAft>
-            </a:pPr>
-            <a:r>
-              <a:rPr sz="1500">
-                <a:solidFill>
-                  <a:srgbClr val="22282E"/>
-                </a:solidFill>
-              </a:rPr>
-              <a:t>•  GVM: "No suitable feed found" o tarea nunca inicia — El feed comunitario aún no terminó de sincronizar; esperar con sudo greenbone-feed-sync y revisar logs de notus-scanner</a:t>
-            </a:r>
-          </a:p>
-          <a:p>
-            <a:pPr>
-              <a:spcAft>
-                <a:spcPts val="600"/>
-              </a:spcAft>
-            </a:pPr>
-            <a:r>
-              <a:rPr sz="1500">
-                <a:solidFill>
-                  <a:srgbClr val="22282E"/>
-                </a:solidFill>
-              </a:rPr>
-              <a:t>•  Escaneo autenticado marcado como "Credentialed checks: no" — Credenciales SSH incorrectas o servicio SSH deshabilitado en el target; validar con ssh msfadmin@&lt;IP&gt; manualmente</a:t>
-            </a:r>
-          </a:p>
-          <a:p>
-            <a:pPr>
-              <a:spcAft>
-                <a:spcPts val="600"/>
-              </a:spcAft>
-            </a:pPr>
-            <a:r>
-              <a:rPr sz="1500">
-                <a:solidFill>
-                  <a:srgbClr val="22282E"/>
-                </a:solidFill>
-              </a:rPr>
-              <a:t>•  El escáner tumba un servicio de la víctima — Política demasiado agresiva (plugins de DoS habilitados); usar plantilla "Basic Network Scan" sin plugins destructivos en labs frágiles</a:t>
-            </a:r>
-          </a:p>
-          <a:p>
-            <a:pPr>
-              <a:spcAft>
-                <a:spcPts val="600"/>
-              </a:spcAft>
-            </a:pPr>
-            <a:r>
-              <a:rPr sz="1500">
-                <a:solidFill>
-                  <a:srgbClr val="22282E"/>
-                </a:solidFill>
-              </a:rPr>
-              <a:t>•  Reporte lleno de "Info" sin hallazgos accionables — Escaneo no autenticado contra un host bien parchado externamente; complementar con escaneo autenticado y revisión manual de servicios</a:t>
-            </a:r>
-          </a:p>
-          <a:p>
-            <a:pPr>
-              <a:spcAft>
-                <a:spcPts val="600"/>
-              </a:spcAft>
-            </a:pPr>
-            <a:r>
-              <a:rPr sz="1500">
-                <a:solidFill>
-                  <a:srgbClr val="22282E"/>
-                </a:solidFill>
-              </a:rPr>
-              <a:t>•  Discrepancia grande entre Nessus y GVM para el mismo host — Feeds de plugins/NVTs distintos y con distinta fecha de actualización; documentar la discrepancia en vez de descartarla sin análisis</a:t>
+              <a:t>•  Instalar Nessus Essentials y realizar un escaneo de descubrimiento (host discovery) sobre el rango 192.168.56.0/24.</a:t>
+            </a:r>
+          </a:p>
+          <a:p>
+            <a:pPr>
+              <a:spcAft>
+                <a:spcPts val="600"/>
+              </a:spcAft>
+            </a:pPr>
+            <a:r>
+              <a:rPr sz="1500">
+                <a:solidFill>
+                  <a:srgbClr val="22282E"/>
+                </a:solidFill>
+              </a:rPr>
+              <a:t>•  Configurar un escaneo autenticado completo contra Metasploitable2 y exportar el reporte en formato PDF/HTML.</a:t>
+            </a:r>
+          </a:p>
+          <a:p>
+            <a:pPr>
+              <a:spcAft>
+                <a:spcPts val="600"/>
+              </a:spcAft>
+            </a:pPr>
+            <a:r>
+              <a:rPr sz="1500">
+                <a:solidFill>
+                  <a:srgbClr val="22282E"/>
+                </a:solidFill>
+              </a:rPr>
+              <a:t>•  Instalar GVM y ejecutar una tarea "Full and fast" contra la misma víctima, comparando tiempos de ejecución con Nessus.</a:t>
+            </a:r>
+          </a:p>
+          <a:p>
+            <a:pPr>
+              <a:spcAft>
+                <a:spcPts val="600"/>
+              </a:spcAft>
+            </a:pPr>
+            <a:r>
+              <a:rPr sz="1500">
+                <a:solidFill>
+                  <a:srgbClr val="22282E"/>
+                </a:solidFill>
+              </a:rPr>
+              <a:t>•  Tomar los cinco hallazgos "Critical" de Nessus, buscar su CVE en NVD y documentar el vector CVSS y el EPSS de cada uno.</a:t>
+            </a:r>
+          </a:p>
+          <a:p>
+            <a:pPr>
+              <a:spcAft>
+                <a:spcPts val="600"/>
+              </a:spcAft>
+            </a:pPr>
+            <a:r>
+              <a:rPr sz="1500">
+                <a:solidFill>
+                  <a:srgbClr val="22282E"/>
+                </a:solidFill>
+              </a:rPr>
+              <a:t>•  Identificar al menos un falso positivo en los resultados y justificar por escrito por qué no representa riesgo real.</a:t>
+            </a:r>
+          </a:p>
+          <a:p>
+            <a:pPr>
+              <a:spcAft>
+                <a:spcPts val="600"/>
+              </a:spcAft>
+            </a:pPr>
+            <a:r>
+              <a:rPr sz="1500">
+                <a:solidFill>
+                  <a:srgbClr val="22282E"/>
+                </a:solidFill>
+              </a:rPr>
+              <a:t>•  Redactar una tabla de priorización de remediación (Critical → Info) considerando explotabilidad (EPSS), exposición e impacto de negocio simulado.</a:t>
             </a:r>
           </a:p>
         </p:txBody>
@@ -3362,7 +3365,7 @@
                   <a:srgbClr val="0B3D2E"/>
                 </a:solidFill>
               </a:rPr>
-              <a:t>❓ Preguntas frecuentes</a:t>
+              <a:t>📝 Reto verificable</a:t>
             </a:r>
           </a:p>
         </p:txBody>
@@ -3400,97 +3403,22 @@
                   <a:srgbClr val="22282E"/>
                 </a:solidFill>
               </a:rPr>
-              <a:t>•  ❓ ¿Es legal usar Nessus u OpenVAS contra cualquier IP que yo elija?</a:t>
-            </a:r>
-          </a:p>
-          <a:p>
-            <a:pPr>
-              <a:spcAft>
-                <a:spcPts val="600"/>
-              </a:spcAft>
-            </a:pPr>
-            <a:r>
-              <a:rPr sz="1500">
-                <a:solidFill>
-                  <a:srgbClr val="22282E"/>
-                </a:solidFill>
-              </a:rPr>
-              <a:t>•  No. Solo es legal contra sistemas propios o con autorización explícita por escrito (contrato de pentesting con reglas de engagement). Escanear activos de terceros sin permiso puede constituir un delito informático incluso sin explotación posterior.</a:t>
-            </a:r>
-          </a:p>
-          <a:p>
-            <a:pPr>
-              <a:spcAft>
-                <a:spcPts val="600"/>
-              </a:spcAft>
-            </a:pPr>
-            <a:r>
-              <a:rPr sz="1500">
-                <a:solidFill>
-                  <a:srgbClr val="22282E"/>
-                </a:solidFill>
-              </a:rPr>
-              <a:t>•  ❓ ¿Un escáner de vulnerabilidades reemplaza el pentest completo?</a:t>
-            </a:r>
-          </a:p>
-          <a:p>
-            <a:pPr>
-              <a:spcAft>
-                <a:spcPts val="600"/>
-              </a:spcAft>
-            </a:pPr>
-            <a:r>
-              <a:rPr sz="1500">
-                <a:solidFill>
-                  <a:srgbClr val="22282E"/>
-                </a:solidFill>
-              </a:rPr>
-              <a:t>•  No. El escáner detecta vulnerabilidades conocidas por firma, pero no encadena ataques, no valida impacto real ni encuentra fallos de lógica de negocio. Es una herramienta dentro del proceso de pentest, no un sustituto.</a:t>
-            </a:r>
-          </a:p>
-          <a:p>
-            <a:pPr>
-              <a:spcAft>
-                <a:spcPts val="600"/>
-              </a:spcAft>
-            </a:pPr>
-            <a:r>
-              <a:rPr sz="1500">
-                <a:solidFill>
-                  <a:srgbClr val="22282E"/>
-                </a:solidFill>
-              </a:rPr>
-              <a:t>•  ❓ ¿Un puntaje CVSS alto significa que debo remediar primero esa vulnerabilidad?</a:t>
-            </a:r>
-          </a:p>
-          <a:p>
-            <a:pPr>
-              <a:spcAft>
-                <a:spcPts val="600"/>
-              </a:spcAft>
-            </a:pPr>
-            <a:r>
-              <a:rPr sz="1500">
-                <a:solidFill>
-                  <a:srgbClr val="22282E"/>
-                </a:solidFill>
-              </a:rPr>
-              <a:t>•  No necesariamente. CVSS base no considera si el activo es crítico para el negocio ni si el exploit está siendo usado activamente; para eso existen el vector temporal, el ambiental, EPSS y fuentes como CISA KEV.</a:t>
-            </a:r>
-          </a:p>
-          <a:p>
-            <a:pPr>
-              <a:spcAft>
-                <a:spcPts val="600"/>
-              </a:spcAft>
-            </a:pPr>
-            <a:r>
-              <a:rPr sz="1500">
-                <a:solidFill>
-                  <a:srgbClr val="22282E"/>
-                </a:solidFill>
-              </a:rPr>
-              <a:t>•  ❓ ¿Nessus Essentials sirve para un pentest profesional real?</a:t>
+              <a:t>•  Reto: Ejecutar escaneos autenticados con Nessus y GVM contra Metasploitable2 y producir un informe consolidado que incluya: (a) total de hallazgos por severidad de cada herramienta, (b) al menos 5…</a:t>
+            </a:r>
+          </a:p>
+          <a:p>
+            <a:pPr>
+              <a:spcAft>
+                <a:spcPts val="600"/>
+              </a:spcAft>
+            </a:pPr>
+            <a:r>
+              <a:rPr sz="1500">
+                <a:solidFill>
+                  <a:srgbClr val="22282E"/>
+                </a:solidFill>
+              </a:rPr>
+              <a:t>•  Criterio de aceptación: El informe debe listar como mínimo un hallazgo "Critical" (ej. vsftpd 2.3.4 backdoor, CVE-2011-2523) detectado por ambas herramientas, con su vector CVSS transcrito…</a:t>
             </a:r>
           </a:p>
         </p:txBody>
@@ -3541,7 +3469,7 @@
                   <a:srgbClr val="0B3D2E"/>
                 </a:solidFill>
               </a:rPr>
-              <a:t>🔗 Referencias</a:t>
+              <a:t>⚠️ Errores comunes</a:t>
             </a:r>
           </a:p>
         </p:txBody>
@@ -3579,6 +3507,364 @@
                   <a:srgbClr val="22282E"/>
                 </a:solidFill>
               </a:rPr>
+              <a:t>•  Nessus queda en "Activating..." indefinidamente — Falta conexión a internet para validar el activation code la primera vez; verificar DNS/proxy y reintentar</a:t>
+            </a:r>
+          </a:p>
+          <a:p>
+            <a:pPr>
+              <a:spcAft>
+                <a:spcPts val="600"/>
+              </a:spcAft>
+            </a:pPr>
+            <a:r>
+              <a:rPr sz="1500">
+                <a:solidFill>
+                  <a:srgbClr val="22282E"/>
+                </a:solidFill>
+              </a:rPr>
+              <a:t>•  GVM: "No suitable feed found" o tarea nunca inicia — El feed comunitario aún no terminó de sincronizar; esperar con sudo greenbone-feed-sync y revisar logs de notus-scanner</a:t>
+            </a:r>
+          </a:p>
+          <a:p>
+            <a:pPr>
+              <a:spcAft>
+                <a:spcPts val="600"/>
+              </a:spcAft>
+            </a:pPr>
+            <a:r>
+              <a:rPr sz="1500">
+                <a:solidFill>
+                  <a:srgbClr val="22282E"/>
+                </a:solidFill>
+              </a:rPr>
+              <a:t>•  Escaneo autenticado marcado como "Credentialed checks: no" — Credenciales SSH incorrectas o servicio SSH deshabilitado en el target; validar con ssh msfadmin@&lt;IP&gt; manualmente</a:t>
+            </a:r>
+          </a:p>
+          <a:p>
+            <a:pPr>
+              <a:spcAft>
+                <a:spcPts val="600"/>
+              </a:spcAft>
+            </a:pPr>
+            <a:r>
+              <a:rPr sz="1500">
+                <a:solidFill>
+                  <a:srgbClr val="22282E"/>
+                </a:solidFill>
+              </a:rPr>
+              <a:t>•  El escáner tumba un servicio de la víctima — Política demasiado agresiva (plugins de DoS habilitados); usar plantilla "Basic Network Scan" sin plugins destructivos en labs frágiles</a:t>
+            </a:r>
+          </a:p>
+          <a:p>
+            <a:pPr>
+              <a:spcAft>
+                <a:spcPts val="600"/>
+              </a:spcAft>
+            </a:pPr>
+            <a:r>
+              <a:rPr sz="1500">
+                <a:solidFill>
+                  <a:srgbClr val="22282E"/>
+                </a:solidFill>
+              </a:rPr>
+              <a:t>•  Reporte lleno de "Info" sin hallazgos accionables — Escaneo no autenticado contra un host bien parchado externamente; complementar con escaneo autenticado y revisión manual de servicios</a:t>
+            </a:r>
+          </a:p>
+          <a:p>
+            <a:pPr>
+              <a:spcAft>
+                <a:spcPts val="600"/>
+              </a:spcAft>
+            </a:pPr>
+            <a:r>
+              <a:rPr sz="1500">
+                <a:solidFill>
+                  <a:srgbClr val="22282E"/>
+                </a:solidFill>
+              </a:rPr>
+              <a:t>•  Discrepancia grande entre Nessus y GVM para el mismo host — Feeds de plugins/NVTs distintos y con distinta fecha de actualización; documentar la discrepancia en vez de descartarla sin análisis</a:t>
+            </a:r>
+          </a:p>
+        </p:txBody>
+      </p:sp>
+    </p:spTree>
+  </p:cSld>
+  <p:clrMapOvr>
+    <a:masterClrMapping/>
+  </p:clrMapOvr>
+</p:sld>
+</file>
+
+<file path=ppt/slides/slide13.xml><?xml version="1.0" encoding="utf-8"?>
+<p:sld xmlns:a="http://schemas.openxmlformats.org/drawingml/2006/main" xmlns:p="http://schemas.openxmlformats.org/presentationml/2006/main" xmlns:r="http://schemas.openxmlformats.org/officeDocument/2006/relationships">
+  <p:cSld>
+    <p:spTree>
+      <p:nvGrpSpPr>
+        <p:cNvPr id="1" name=""/>
+        <p:cNvGrpSpPr/>
+        <p:nvPr/>
+      </p:nvGrpSpPr>
+      <p:grpSpPr/>
+      <p:sp>
+        <p:nvSpPr>
+          <p:cNvPr id="2" name="TextBox 1"/>
+          <p:cNvSpPr txBox="1"/>
+          <p:nvPr/>
+        </p:nvSpPr>
+        <p:spPr>
+          <a:xfrm>
+            <a:off x="457200" y="320040"/>
+            <a:ext cx="8229600" cy="822960"/>
+          </a:xfrm>
+          <a:prstGeom prst="rect">
+            <a:avLst/>
+          </a:prstGeom>
+          <a:noFill/>
+        </p:spPr>
+        <p:txBody>
+          <a:bodyPr wrap="square">
+            <a:spAutoFit/>
+          </a:bodyPr>
+          <a:lstStyle/>
+          <a:p>
+            <a:r>
+              <a:rPr sz="2600" b="1">
+                <a:solidFill>
+                  <a:srgbClr val="0B3D2E"/>
+                </a:solidFill>
+              </a:rPr>
+              <a:t>❓ Preguntas frecuentes</a:t>
+            </a:r>
+          </a:p>
+        </p:txBody>
+      </p:sp>
+      <p:sp>
+        <p:nvSpPr>
+          <p:cNvPr id="3" name="TextBox 2"/>
+          <p:cNvSpPr txBox="1"/>
+          <p:nvPr/>
+        </p:nvSpPr>
+        <p:spPr>
+          <a:xfrm>
+            <a:off x="457200" y="1280160"/>
+            <a:ext cx="8229600" cy="4937760"/>
+          </a:xfrm>
+          <a:prstGeom prst="rect">
+            <a:avLst/>
+          </a:prstGeom>
+          <a:noFill/>
+        </p:spPr>
+        <p:txBody>
+          <a:bodyPr wrap="square">
+            <a:spAutoFit/>
+          </a:bodyPr>
+          <a:lstStyle/>
+          <a:p>
+            <a:pPr>
+              <a:spcAft>
+                <a:spcPts val="600"/>
+              </a:spcAft>
+            </a:pPr>
+            <a:r>
+              <a:rPr sz="1500">
+                <a:solidFill>
+                  <a:srgbClr val="22282E"/>
+                </a:solidFill>
+              </a:rPr>
+              <a:t>•  ❓ ¿Es legal usar Nessus u OpenVAS contra cualquier IP que yo elija?</a:t>
+            </a:r>
+          </a:p>
+          <a:p>
+            <a:pPr>
+              <a:spcAft>
+                <a:spcPts val="600"/>
+              </a:spcAft>
+            </a:pPr>
+            <a:r>
+              <a:rPr sz="1500">
+                <a:solidFill>
+                  <a:srgbClr val="22282E"/>
+                </a:solidFill>
+              </a:rPr>
+              <a:t>•  No. Solo es legal contra sistemas propios o con autorización explícita por escrito (contrato de pentesting con reglas de engagement). Escanear activos de terceros sin permiso puede constituir un…</a:t>
+            </a:r>
+          </a:p>
+          <a:p>
+            <a:pPr>
+              <a:spcAft>
+                <a:spcPts val="600"/>
+              </a:spcAft>
+            </a:pPr>
+            <a:r>
+              <a:rPr sz="1500">
+                <a:solidFill>
+                  <a:srgbClr val="22282E"/>
+                </a:solidFill>
+              </a:rPr>
+              <a:t>•  ❓ ¿Un escáner de vulnerabilidades reemplaza el pentest completo?</a:t>
+            </a:r>
+          </a:p>
+          <a:p>
+            <a:pPr>
+              <a:spcAft>
+                <a:spcPts val="600"/>
+              </a:spcAft>
+            </a:pPr>
+            <a:r>
+              <a:rPr sz="1500">
+                <a:solidFill>
+                  <a:srgbClr val="22282E"/>
+                </a:solidFill>
+              </a:rPr>
+              <a:t>•  No. El escáner detecta vulnerabilidades conocidas por firma, pero no encadena ataques, no valida impacto real ni encuentra fallos de lógica de negocio. Es una herramienta dentro del proceso de…</a:t>
+            </a:r>
+          </a:p>
+          <a:p>
+            <a:pPr>
+              <a:spcAft>
+                <a:spcPts val="600"/>
+              </a:spcAft>
+            </a:pPr>
+            <a:r>
+              <a:rPr sz="1500">
+                <a:solidFill>
+                  <a:srgbClr val="22282E"/>
+                </a:solidFill>
+              </a:rPr>
+              <a:t>•  ❓ ¿Un puntaje CVSS alto significa que debo remediar primero esa vulnerabilidad?</a:t>
+            </a:r>
+          </a:p>
+          <a:p>
+            <a:pPr>
+              <a:spcAft>
+                <a:spcPts val="600"/>
+              </a:spcAft>
+            </a:pPr>
+            <a:r>
+              <a:rPr sz="1500">
+                <a:solidFill>
+                  <a:srgbClr val="22282E"/>
+                </a:solidFill>
+              </a:rPr>
+              <a:t>•  No necesariamente. CVSS base no considera si el activo es crítico para el negocio ni si el exploit está siendo usado activamente; para eso existen el vector temporal, el ambiental, EPSS y fuentes…</a:t>
+            </a:r>
+          </a:p>
+          <a:p>
+            <a:pPr>
+              <a:spcAft>
+                <a:spcPts val="600"/>
+              </a:spcAft>
+            </a:pPr>
+            <a:r>
+              <a:rPr sz="1500">
+                <a:solidFill>
+                  <a:srgbClr val="22282E"/>
+                </a:solidFill>
+              </a:rPr>
+              <a:t>•  ❓ ¿Nessus Essentials sirve para un pentest profesional real?</a:t>
+            </a:r>
+          </a:p>
+        </p:txBody>
+      </p:sp>
+    </p:spTree>
+  </p:cSld>
+  <p:clrMapOvr>
+    <a:masterClrMapping/>
+  </p:clrMapOvr>
+</p:sld>
+</file>
+
+<file path=ppt/slides/slide14.xml><?xml version="1.0" encoding="utf-8"?>
+<p:sld xmlns:a="http://schemas.openxmlformats.org/drawingml/2006/main" xmlns:p="http://schemas.openxmlformats.org/presentationml/2006/main" xmlns:r="http://schemas.openxmlformats.org/officeDocument/2006/relationships">
+  <p:cSld>
+    <p:spTree>
+      <p:nvGrpSpPr>
+        <p:cNvPr id="1" name=""/>
+        <p:cNvGrpSpPr/>
+        <p:nvPr/>
+      </p:nvGrpSpPr>
+      <p:grpSpPr/>
+      <p:sp>
+        <p:nvSpPr>
+          <p:cNvPr id="2" name="TextBox 1"/>
+          <p:cNvSpPr txBox="1"/>
+          <p:nvPr/>
+        </p:nvSpPr>
+        <p:spPr>
+          <a:xfrm>
+            <a:off x="457200" y="320040"/>
+            <a:ext cx="8229600" cy="822960"/>
+          </a:xfrm>
+          <a:prstGeom prst="rect">
+            <a:avLst/>
+          </a:prstGeom>
+          <a:noFill/>
+        </p:spPr>
+        <p:txBody>
+          <a:bodyPr wrap="square">
+            <a:spAutoFit/>
+          </a:bodyPr>
+          <a:lstStyle/>
+          <a:p>
+            <a:r>
+              <a:rPr sz="2600" b="1">
+                <a:solidFill>
+                  <a:srgbClr val="0B3D2E"/>
+                </a:solidFill>
+              </a:rPr>
+              <a:t>🔗 Referencias</a:t>
+            </a:r>
+          </a:p>
+        </p:txBody>
+      </p:sp>
+      <p:sp>
+        <p:nvSpPr>
+          <p:cNvPr id="3" name="TextBox 2"/>
+          <p:cNvSpPr txBox="1"/>
+          <p:nvPr/>
+        </p:nvSpPr>
+        <p:spPr>
+          <a:xfrm>
+            <a:off x="457200" y="1280160"/>
+            <a:ext cx="8229600" cy="4937760"/>
+          </a:xfrm>
+          <a:prstGeom prst="rect">
+            <a:avLst/>
+          </a:prstGeom>
+          <a:noFill/>
+        </p:spPr>
+        <p:txBody>
+          <a:bodyPr wrap="square">
+            <a:spAutoFit/>
+          </a:bodyPr>
+          <a:lstStyle/>
+          <a:p>
+            <a:pPr>
+              <a:spcAft>
+                <a:spcPts val="600"/>
+              </a:spcAft>
+            </a:pPr>
+            <a:r>
+              <a:rPr sz="1500">
+                <a:solidFill>
+                  <a:srgbClr val="22282E"/>
+                </a:solidFill>
+              </a:rPr>
+              <a:t>•  🏢 En la empresa: los escáneres comerciales equivalentes son Tenable Nessus / Tenable.io, Qualys VMDR y Rapid7 InsightVM (Nexpose) — mismos conceptos, distinta herramienta según el empleador.</a:t>
+            </a:r>
+          </a:p>
+          <a:p>
+            <a:pPr>
+              <a:spcAft>
+                <a:spcPts val="600"/>
+              </a:spcAft>
+            </a:pPr>
+            <a:r>
+              <a:rPr sz="1500">
+                <a:solidFill>
+                  <a:srgbClr val="22282E"/>
+                </a:solidFill>
+              </a:rPr>
               <a:t>•  Rapid7, documentación oficial de Metasploitable2/3: &lt;https://github.com/rapid7/metasploitable3&gt;</a:t>
             </a:r>
           </a:p>
@@ -3659,6 +3945,81 @@
           </a:p>
         </p:txBody>
       </p:sp>
+    </p:spTree>
+  </p:cSld>
+  <p:clrMapOvr>
+    <a:masterClrMapping/>
+  </p:clrMapOvr>
+</p:sld>
+</file>
+
+<file path=ppt/slides/slide15.xml><?xml version="1.0" encoding="utf-8"?>
+<p:sld xmlns:a="http://schemas.openxmlformats.org/drawingml/2006/main" xmlns:p="http://schemas.openxmlformats.org/presentationml/2006/main" xmlns:r="http://schemas.openxmlformats.org/officeDocument/2006/relationships">
+  <p:cSld>
+    <p:spTree>
+      <p:nvGrpSpPr>
+        <p:cNvPr id="1" name=""/>
+        <p:cNvGrpSpPr/>
+        <p:nvPr/>
+      </p:nvGrpSpPr>
+      <p:grpSpPr/>
+      <p:sp>
+        <p:nvSpPr>
+          <p:cNvPr id="2" name="TextBox 1"/>
+          <p:cNvSpPr txBox="1"/>
+          <p:nvPr/>
+        </p:nvSpPr>
+        <p:spPr>
+          <a:xfrm>
+            <a:off x="457200" y="274320"/>
+            <a:ext cx="8229600" cy="640080"/>
+          </a:xfrm>
+          <a:prstGeom prst="rect">
+            <a:avLst/>
+          </a:prstGeom>
+          <a:noFill/>
+        </p:spPr>
+        <p:txBody>
+          <a:bodyPr wrap="square">
+            <a:spAutoFit/>
+          </a:bodyPr>
+          <a:lstStyle/>
+          <a:p>
+            <a:r>
+              <a:rPr sz="2200" b="1">
+                <a:solidFill>
+                  <a:srgbClr val="0B3D2E"/>
+                </a:solidFill>
+              </a:rPr>
+              <a:t>Diagrama de la clase</a:t>
+            </a:r>
+          </a:p>
+        </p:txBody>
+      </p:sp>
+      <p:pic>
+        <p:nvPicPr>
+          <p:cNvPr id="3" name="Picture 2" descr="a6db68a2d63d0b24.png"/>
+          <p:cNvPicPr>
+            <a:picLocks noChangeAspect="1"/>
+          </p:cNvPicPr>
+          <p:nvPr/>
+        </p:nvPicPr>
+        <p:blipFill>
+          <a:blip r:embed="rId2"/>
+          <a:stretch>
+            <a:fillRect/>
+          </a:stretch>
+        </p:blipFill>
+        <p:spPr>
+          <a:xfrm>
+            <a:off x="457200" y="3195828"/>
+            <a:ext cx="8229600" cy="1106424"/>
+          </a:xfrm>
+          <a:prstGeom prst="rect">
+            <a:avLst/>
+          </a:prstGeom>
+        </p:spPr>
+      </p:pic>
     </p:spTree>
   </p:cSld>
   <p:clrMapOvr>
@@ -3743,7 +4104,7 @@
                   <a:srgbClr val="22282E"/>
                 </a:solidFill>
               </a:rPr>
-              <a:t>•  El alumno aprenderá a operar dos escáneres de vulnerabilidades de clase empresarial —Nessus (edición Essentials) y OpenVAS/Greenbone Vulnerability Management (GVM)— para descubrir, clasificar y priorizar debilidades en sistemas de un laboratorio controlado. Al terminar la clase, el alumno entenderá cómo se construye una política de escaneo, cómo se interpreta un hallazgo con su puntaje CVSS y por qué el analista humano sigue siendo indispensable para separar el ruido de los riesgos reales.</a:t>
+              <a:t>•  El alumno aprenderá a operar dos escáneres de vulnerabilidades de clase empresarial —Nessus (edición Essentials) y OpenVAS/Greenbone Vulnerability Management (GVM)— para descubrir, clasificar y…</a:t>
             </a:r>
           </a:p>
         </p:txBody>
@@ -4152,7 +4513,7 @@
                   <a:srgbClr val="0B3D2E"/>
                 </a:solidFill>
               </a:rPr>
-              <a:t>📖 Definiciones y características</a:t>
+              <a:t>🧠 Explicación en profundidad</a:t>
             </a:r>
           </a:p>
         </p:txBody>
@@ -4190,97 +4551,97 @@
                   <a:srgbClr val="22282E"/>
                 </a:solidFill>
               </a:rPr>
-              <a:t>•  Nessus (Tenable): escáner de vulnerabilidades comercial con motor de plugins (NASL - Nessus Attack Scripting Language). Característica clave: base de firmas actualizada diariamente y detección de configuraciones erróneas además de CVEs.</a:t>
-            </a:r>
-          </a:p>
-          <a:p>
-            <a:pPr>
-              <a:spcAft>
-                <a:spcPts val="600"/>
-              </a:spcAft>
-            </a:pPr>
-            <a:r>
-              <a:rPr sz="1500">
-                <a:solidFill>
-                  <a:srgbClr val="22282E"/>
-                </a:solidFill>
-              </a:rPr>
-              <a:t>•  OpenVAS / GVM (Greenbone Vulnerability Management): suite open source que sucede al proyecto original OpenVAS; usa NVTs (Network Vulnerability Tests) en lugar de plugins propietarios. Característica clave: feed comunitario (Greenbone Community Feed) actualizado a diario, totalmente auditable.</a:t>
-            </a:r>
-          </a:p>
-          <a:p>
-            <a:pPr>
-              <a:spcAft>
-                <a:spcPts val="600"/>
-              </a:spcAft>
-            </a:pPr>
-            <a:r>
-              <a:rPr sz="1500">
-                <a:solidFill>
-                  <a:srgbClr val="22282E"/>
-                </a:solidFill>
-              </a:rPr>
-              <a:t>•  CVSS (Common Vulnerability Scoring System): estándar del FIRST (Forum of Incident Response and Security Teams) para puntuar severidad de 0.0 a 10.0. Característica clave: se compone de métricas base (inmutables), temporales (cambian con el tiempo, ej. disponibilidad de exploit) y ambientales (ajustadas al contexto del activo).</a:t>
-            </a:r>
-          </a:p>
-          <a:p>
-            <a:pPr>
-              <a:spcAft>
-                <a:spcPts val="600"/>
-              </a:spcAft>
-            </a:pPr>
-            <a:r>
-              <a:rPr sz="1500">
-                <a:solidFill>
-                  <a:srgbClr val="22282E"/>
-                </a:solidFill>
-              </a:rPr>
-              <a:t>•  CVE (Common Vulnerabilities and Exposures): identificador único y estandarizado (ej. CVE-2024-XXXX) mantenido por MITRE para una vulnerabilidad específica. Característica clave: es un identificador, no una puntuación de severidad.</a:t>
-            </a:r>
-          </a:p>
-          <a:p>
-            <a:pPr>
-              <a:spcAft>
-                <a:spcPts val="600"/>
-              </a:spcAft>
-            </a:pPr>
-            <a:r>
-              <a:rPr sz="1500">
-                <a:solidFill>
-                  <a:srgbClr val="22282E"/>
-                </a:solidFill>
-              </a:rPr>
-              <a:t>•  NVD (National Vulnerability Database): base de datos del NIST que enriquece cada CVE con puntaje CVSS, CWE y referencias. Característica clave: es la fuente "oficial" que los escáneres consultan para enriquecer sus plugins.</a:t>
-            </a:r>
-          </a:p>
-          <a:p>
-            <a:pPr>
-              <a:spcAft>
-                <a:spcPts val="600"/>
-              </a:spcAft>
-            </a:pPr>
-            <a:r>
-              <a:rPr sz="1500">
-                <a:solidFill>
-                  <a:srgbClr val="22282E"/>
-                </a:solidFill>
-              </a:rPr>
-              <a:t>•  EPSS (Exploit Prediction Scoring System): puntaje de FIRST que estima la probabilidad de que un CVE sea explotado en los próximos 30 días. Característica clave: complementa a CVSS porque mide probabilidad real de explotación, no solo severidad técnica.</a:t>
-            </a:r>
-          </a:p>
-          <a:p>
-            <a:pPr>
-              <a:spcAft>
-                <a:spcPts val="600"/>
-              </a:spcAft>
-            </a:pPr>
-            <a:r>
-              <a:rPr sz="1500">
-                <a:solidFill>
-                  <a:srgbClr val="22282E"/>
-                </a:solidFill>
-              </a:rPr>
-              <a:t>•  Falso positivo: hallazgo reportado por el escáner que no representa un riesgo real (banner mal interpretado, versión backportada con parche aplicado). Característica clave: requiere verificación manual (banner grabbing, prueba de concepto) antes de reportarlo al cliente.</a:t>
+              <a:t>•  Un escáner de vulnerabilidades (Nessus, OpenVAS/Greenbone) automatiza la comparación entre</a:t>
+            </a:r>
+          </a:p>
+          <a:p>
+            <a:pPr>
+              <a:spcAft>
+                <a:spcPts val="600"/>
+              </a:spcAft>
+            </a:pPr>
+            <a:r>
+              <a:rPr sz="1500">
+                <a:solidFill>
+                  <a:srgbClr val="22282E"/>
+                </a:solidFill>
+              </a:rPr>
+              <a:t>•  lo que encuentra en un objetivo y una base de firmas de problemas conocidos. Su valor es</a:t>
+            </a:r>
+          </a:p>
+          <a:p>
+            <a:pPr>
+              <a:spcAft>
+                <a:spcPts val="600"/>
+              </a:spcAft>
+            </a:pPr>
+            <a:r>
+              <a:rPr sz="1500">
+                <a:solidFill>
+                  <a:srgbClr val="22282E"/>
+                </a:solidFill>
+              </a:rPr>
+              <a:t>•  la amplitud: revisa cientos de hosts contra decenas de miles de comprobaciones en el</a:t>
+            </a:r>
+          </a:p>
+          <a:p>
+            <a:pPr>
+              <a:spcAft>
+                <a:spcPts val="600"/>
+              </a:spcAft>
+            </a:pPr>
+            <a:r>
+              <a:rPr sz="1500">
+                <a:solidFill>
+                  <a:srgbClr val="22282E"/>
+                </a:solidFill>
+              </a:rPr>
+              <a:t>•  tiempo que un humano tardaría en mirar uno. Su límite es que no piensa: no encadena</a:t>
+            </a:r>
+          </a:p>
+          <a:p>
+            <a:pPr>
+              <a:spcAft>
+                <a:spcPts val="600"/>
+              </a:spcAft>
+            </a:pPr>
+            <a:r>
+              <a:rPr sz="1500">
+                <a:solidFill>
+                  <a:srgbClr val="22282E"/>
+                </a:solidFill>
+              </a:rPr>
+              <a:t>•  hallazgos, no entiende el contexto de negocio y, sobre todo, no confirma explotabilidad.</a:t>
+            </a:r>
+          </a:p>
+          <a:p>
+            <a:pPr>
+              <a:spcAft>
+                <a:spcPts val="600"/>
+              </a:spcAft>
+            </a:pPr>
+            <a:r>
+              <a:rPr sz="1500">
+                <a:solidFill>
+                  <a:srgbClr val="22282E"/>
+                </a:solidFill>
+              </a:rPr>
+              <a:t>•  Por eso el escaneo no sustituye al pentest; lo alimenta. Interpretar bien su salida —separar</a:t>
+            </a:r>
+          </a:p>
+          <a:p>
+            <a:pPr>
+              <a:spcAft>
+                <a:spcPts val="600"/>
+              </a:spcAft>
+            </a:pPr>
+            <a:r>
+              <a:rPr sz="1500">
+                <a:solidFill>
+                  <a:srgbClr val="22282E"/>
+                </a:solidFill>
+              </a:rPr>
+              <a:t>•  lo real de lo ruidoso— es la destreza que esta clase enseña.</a:t>
             </a:r>
           </a:p>
         </p:txBody>
@@ -4331,7 +4692,7 @@
                   <a:srgbClr val="0B3D2E"/>
                 </a:solidFill>
               </a:rPr>
-              <a:t>🧰 Herramientas y preparación</a:t>
+              <a:t>📖 Definiciones y características</a:t>
             </a:r>
           </a:p>
         </p:txBody>
@@ -4369,97 +4730,97 @@
                   <a:srgbClr val="22282E"/>
                 </a:solidFill>
               </a:rPr>
-              <a:t>•  Máquina atacante: Kali Linux o Parrot OS (VM), 4 GB RAM mínimo, red interna tipo "host-only" o "internal network" en VirtualBox/VMware — nunca conectada directamente a redes de producción o internet sin control.</a:t>
-            </a:r>
-          </a:p>
-          <a:p>
-            <a:pPr>
-              <a:spcAft>
-                <a:spcPts val="600"/>
-              </a:spcAft>
-            </a:pPr>
-            <a:r>
-              <a:rPr sz="1500">
-                <a:solidFill>
-                  <a:srgbClr val="22282E"/>
-                </a:solidFill>
-              </a:rPr>
-              <a:t>•  Nessus Essentials: descargar desde tenable.com/products/nessus/nessus-essentials, registrar activation code gratuito (email), instalar .deb/.rpm según distro:</a:t>
-            </a:r>
-          </a:p>
-          <a:p>
-            <a:pPr>
-              <a:spcAft>
-                <a:spcPts val="600"/>
-              </a:spcAft>
-            </a:pPr>
-            <a:r>
-              <a:rPr sz="1500">
-                <a:solidFill>
-                  <a:srgbClr val="22282E"/>
-                </a:solidFill>
-              </a:rPr>
-              <a:t>•  sudo dpkg -i Nessus-.deb</a:t>
-            </a:r>
-          </a:p>
-          <a:p>
-            <a:pPr>
-              <a:spcAft>
-                <a:spcPts val="600"/>
-              </a:spcAft>
-            </a:pPr>
-            <a:r>
-              <a:rPr sz="1500">
-                <a:solidFill>
-                  <a:srgbClr val="22282E"/>
-                </a:solidFill>
-              </a:rPr>
-              <a:t>•  sudo systemctl start nessusd</a:t>
-            </a:r>
-          </a:p>
-          <a:p>
-            <a:pPr>
-              <a:spcAft>
-                <a:spcPts val="600"/>
-              </a:spcAft>
-            </a:pPr>
-            <a:r>
-              <a:rPr sz="1500">
-                <a:solidFill>
-                  <a:srgbClr val="22282E"/>
-                </a:solidFill>
-              </a:rPr>
-              <a:t>•  OpenVAS/GVM: en Kali puede instalarse nativo o vía Docker. Nativo:</a:t>
-            </a:r>
-          </a:p>
-          <a:p>
-            <a:pPr>
-              <a:spcAft>
-                <a:spcPts val="600"/>
-              </a:spcAft>
-            </a:pPr>
-            <a:r>
-              <a:rPr sz="1500">
-                <a:solidFill>
-                  <a:srgbClr val="22282E"/>
-                </a:solidFill>
-              </a:rPr>
-              <a:t>•  sudo apt update &amp;&amp; sudo apt install -y openvas</a:t>
-            </a:r>
-          </a:p>
-          <a:p>
-            <a:pPr>
-              <a:spcAft>
-                <a:spcPts val="600"/>
-              </a:spcAft>
-            </a:pPr>
-            <a:r>
-              <a:rPr sz="1500">
-                <a:solidFill>
-                  <a:srgbClr val="22282E"/>
-                </a:solidFill>
-              </a:rPr>
-              <a:t>•  sudo gvm-setup</a:t>
+              <a:t>•  Nessus (Tenable): escáner de vulnerabilidades comercial con motor de plugins (NASL - Nessus Attack Scripting Language). Característica clave: base de firmas actualizada diariamente y detección de…</a:t>
+            </a:r>
+          </a:p>
+          <a:p>
+            <a:pPr>
+              <a:spcAft>
+                <a:spcPts val="600"/>
+              </a:spcAft>
+            </a:pPr>
+            <a:r>
+              <a:rPr sz="1500">
+                <a:solidFill>
+                  <a:srgbClr val="22282E"/>
+                </a:solidFill>
+              </a:rPr>
+              <a:t>•  OpenVAS / GVM (Greenbone Vulnerability Management): suite open source que sucede al proyecto original OpenVAS; usa NVTs (Network Vulnerability Tests) en lugar de plugins propietarios. Característica…</a:t>
+            </a:r>
+          </a:p>
+          <a:p>
+            <a:pPr>
+              <a:spcAft>
+                <a:spcPts val="600"/>
+              </a:spcAft>
+            </a:pPr>
+            <a:r>
+              <a:rPr sz="1500">
+                <a:solidFill>
+                  <a:srgbClr val="22282E"/>
+                </a:solidFill>
+              </a:rPr>
+              <a:t>•  CVSS (Common Vulnerability Scoring System): estándar del FIRST (Forum of Incident Response and Security Teams) para puntuar severidad de 0.0 a 10.0. Característica clave: se compone de métricas base…</a:t>
+            </a:r>
+          </a:p>
+          <a:p>
+            <a:pPr>
+              <a:spcAft>
+                <a:spcPts val="600"/>
+              </a:spcAft>
+            </a:pPr>
+            <a:r>
+              <a:rPr sz="1500">
+                <a:solidFill>
+                  <a:srgbClr val="22282E"/>
+                </a:solidFill>
+              </a:rPr>
+              <a:t>•  CVE (Common Vulnerabilities and Exposures): identificador único y estandarizado (ej. CVE-2024-XXXX) mantenido por MITRE para una vulnerabilidad específica. Característica clave: es un identificador…</a:t>
+            </a:r>
+          </a:p>
+          <a:p>
+            <a:pPr>
+              <a:spcAft>
+                <a:spcPts val="600"/>
+              </a:spcAft>
+            </a:pPr>
+            <a:r>
+              <a:rPr sz="1500">
+                <a:solidFill>
+                  <a:srgbClr val="22282E"/>
+                </a:solidFill>
+              </a:rPr>
+              <a:t>•  NVD (National Vulnerability Database): base de datos del NIST que enriquece cada CVE con puntaje CVSS, CWE y referencias. Característica clave: es la fuente "oficial" que los escáneres consultan para…</a:t>
+            </a:r>
+          </a:p>
+          <a:p>
+            <a:pPr>
+              <a:spcAft>
+                <a:spcPts val="600"/>
+              </a:spcAft>
+            </a:pPr>
+            <a:r>
+              <a:rPr sz="1500">
+                <a:solidFill>
+                  <a:srgbClr val="22282E"/>
+                </a:solidFill>
+              </a:rPr>
+              <a:t>•  EPSS (Exploit Prediction Scoring System): puntaje de FIRST que estima la probabilidad de que un CVE sea explotado en los próximos 30 días. Característica clave: complementa a CVSS porque mide…</a:t>
+            </a:r>
+          </a:p>
+          <a:p>
+            <a:pPr>
+              <a:spcAft>
+                <a:spcPts val="600"/>
+              </a:spcAft>
+            </a:pPr>
+            <a:r>
+              <a:rPr sz="1500">
+                <a:solidFill>
+                  <a:srgbClr val="22282E"/>
+                </a:solidFill>
+              </a:rPr>
+              <a:t>•  Falso positivo: hallazgo reportado por el escáner que no representa un riesgo real (banner mal interpretado, versión backportada con parche aplicado). Característica clave: requiere verificación…</a:t>
             </a:r>
           </a:p>
         </p:txBody>
@@ -4510,7 +4871,7 @@
                   <a:srgbClr val="0B3D2E"/>
                 </a:solidFill>
               </a:rPr>
-              <a:t>🧪 Laboratorio guiado</a:t>
+              <a:t>📔 Glosario</a:t>
             </a:r>
           </a:p>
         </p:txBody>
@@ -4548,97 +4909,97 @@
                   <a:srgbClr val="22282E"/>
                 </a:solidFill>
               </a:rPr>
-              <a:t>•  Levantar la red interna en el hipervisor y confirmar que Kali y Metasploitable2 están en el mismo segmento sin salida a producción: ip a en Kali, ping &lt;IP-metasploitable&gt;.</a:t>
-            </a:r>
-          </a:p>
-          <a:p>
-            <a:pPr>
-              <a:spcAft>
-                <a:spcPts val="600"/>
-              </a:spcAft>
-            </a:pPr>
-            <a:r>
-              <a:rPr sz="1500">
-                <a:solidFill>
-                  <a:srgbClr val="22282E"/>
-                </a:solidFill>
-              </a:rPr>
-              <a:t>•  Iniciar el servicio de Nessus (sudo systemctl start nessusd) y acceder a https://localhost:8834, completando el asistente con el activation code.</a:t>
-            </a:r>
-          </a:p>
-          <a:p>
-            <a:pPr>
-              <a:spcAft>
-                <a:spcPts val="600"/>
-              </a:spcAft>
-            </a:pPr>
-            <a:r>
-              <a:rPr sz="1500">
-                <a:solidFill>
-                  <a:srgbClr val="22282E"/>
-                </a:solidFill>
-              </a:rPr>
-              <a:t>•  Crear un nuevo escaneo: New Scan → Basic Network Scan, definir Name: Lab-Metasploitable2, Targets: 192.168.56.101 (IP de la víctima).</a:t>
-            </a:r>
-          </a:p>
-          <a:p>
-            <a:pPr>
-              <a:spcAft>
-                <a:spcPts val="600"/>
-              </a:spcAft>
-            </a:pPr>
-            <a:r>
-              <a:rPr sz="1500">
-                <a:solidFill>
-                  <a:srgbClr val="22282E"/>
-                </a:solidFill>
-              </a:rPr>
-              <a:t>•  Configurar credenciales SSH en la pestaña Credentials para habilitar escaneo autenticado (usuario msfadmin, contraseña msfadmin — credenciales por defecto documentadas de Metasploitable2).</a:t>
-            </a:r>
-          </a:p>
-          <a:p>
-            <a:pPr>
-              <a:spcAft>
-                <a:spcPts val="600"/>
-              </a:spcAft>
-            </a:pPr>
-            <a:r>
-              <a:rPr sz="1500">
-                <a:solidFill>
-                  <a:srgbClr val="22282E"/>
-                </a:solidFill>
-              </a:rPr>
-              <a:t>•  Lanzar el escaneo y esperar finalización; revisar el resumen por severidad (Critical/High/Medium/Low/Info).</a:t>
-            </a:r>
-          </a:p>
-          <a:p>
-            <a:pPr>
-              <a:spcAft>
-                <a:spcPts val="600"/>
-              </a:spcAft>
-            </a:pPr>
-            <a:r>
-              <a:rPr sz="1500">
-                <a:solidFill>
-                  <a:srgbClr val="22282E"/>
-                </a:solidFill>
-              </a:rPr>
-              <a:t>•  Abrir un hallazgo "Critical", leer el Synopsis, Description, Solution y el vector CVSS asociado (ej. AV:N/AC:L/PR:N/UI:N/S:U/C:H/I:H/A:H).</a:t>
-            </a:r>
-          </a:p>
-          <a:p>
-            <a:pPr>
-              <a:spcAft>
-                <a:spcPts val="600"/>
-              </a:spcAft>
-            </a:pPr>
-            <a:r>
-              <a:rPr sz="1500">
-                <a:solidFill>
-                  <a:srgbClr val="22282E"/>
-                </a:solidFill>
-              </a:rPr>
-              <a:t>•  Levantar GVM (sudo gvm-start o docker-compose up -d según la instalación) y esperar sincronización del feed comunitario (puede tardar horas la primera vez).</a:t>
+              <a:t>•  Término — Definición concisa</a:t>
+            </a:r>
+          </a:p>
+          <a:p>
+            <a:pPr>
+              <a:spcAft>
+                <a:spcPts val="600"/>
+              </a:spcAft>
+            </a:pPr>
+            <a:r>
+              <a:rPr sz="1500">
+                <a:solidFill>
+                  <a:srgbClr val="22282E"/>
+                </a:solidFill>
+              </a:rPr>
+              <a:t>•  Escáner de vulnerabilidades — Herramienta que compara el objetivo con firmas conocidas</a:t>
+            </a:r>
+          </a:p>
+          <a:p>
+            <a:pPr>
+              <a:spcAft>
+                <a:spcPts val="600"/>
+              </a:spcAft>
+            </a:pPr>
+            <a:r>
+              <a:rPr sz="1500">
+                <a:solidFill>
+                  <a:srgbClr val="22282E"/>
+                </a:solidFill>
+              </a:rPr>
+              <a:t>•  Nessus — Escáner comercial estándar de la industria</a:t>
+            </a:r>
+          </a:p>
+          <a:p>
+            <a:pPr>
+              <a:spcAft>
+                <a:spcPts val="600"/>
+              </a:spcAft>
+            </a:pPr>
+            <a:r>
+              <a:rPr sz="1500">
+                <a:solidFill>
+                  <a:srgbClr val="22282E"/>
+                </a:solidFill>
+              </a:rPr>
+              <a:t>•  OpenVAS / Greenbone (GVM) — Alternativa open source</a:t>
+            </a:r>
+          </a:p>
+          <a:p>
+            <a:pPr>
+              <a:spcAft>
+                <a:spcPts val="600"/>
+              </a:spcAft>
+            </a:pPr>
+            <a:r>
+              <a:rPr sz="1500">
+                <a:solidFill>
+                  <a:srgbClr val="22282E"/>
+                </a:solidFill>
+              </a:rPr>
+              <a:t>•  Plugin / NVT — Comprobación individual de un escáner</a:t>
+            </a:r>
+          </a:p>
+          <a:p>
+            <a:pPr>
+              <a:spcAft>
+                <a:spcPts val="600"/>
+              </a:spcAft>
+            </a:pPr>
+            <a:r>
+              <a:rPr sz="1500">
+                <a:solidFill>
+                  <a:srgbClr val="22282E"/>
+                </a:solidFill>
+              </a:rPr>
+              <a:t>•  Base de firmas — Catálogo de problemas conocidos que el escáner busca</a:t>
+            </a:r>
+          </a:p>
+          <a:p>
+            <a:pPr>
+              <a:spcAft>
+                <a:spcPts val="600"/>
+              </a:spcAft>
+            </a:pPr>
+            <a:r>
+              <a:rPr sz="1500">
+                <a:solidFill>
+                  <a:srgbClr val="22282E"/>
+                </a:solidFill>
+              </a:rPr>
+              <a:t>•  Escaneo autenticado — Con credenciales; audita desde dentro, menos falsos positivos</a:t>
             </a:r>
           </a:p>
         </p:txBody>
@@ -4689,7 +5050,7 @@
                   <a:srgbClr val="0B3D2E"/>
                 </a:solidFill>
               </a:rPr>
-              <a:t>✍️ Ejercicios</a:t>
+              <a:t>🧰 Herramientas y preparación</a:t>
             </a:r>
           </a:p>
         </p:txBody>
@@ -4727,82 +5088,82 @@
                   <a:srgbClr val="22282E"/>
                 </a:solidFill>
               </a:rPr>
-              <a:t>•  Instalar Nessus Essentials y realizar un escaneo de descubrimiento (host discovery) sobre el rango 192.168.56.0/24.</a:t>
-            </a:r>
-          </a:p>
-          <a:p>
-            <a:pPr>
-              <a:spcAft>
-                <a:spcPts val="600"/>
-              </a:spcAft>
-            </a:pPr>
-            <a:r>
-              <a:rPr sz="1500">
-                <a:solidFill>
-                  <a:srgbClr val="22282E"/>
-                </a:solidFill>
-              </a:rPr>
-              <a:t>•  Configurar un escaneo autenticado completo contra Metasploitable2 y exportar el reporte en formato PDF/HTML.</a:t>
-            </a:r>
-          </a:p>
-          <a:p>
-            <a:pPr>
-              <a:spcAft>
-                <a:spcPts val="600"/>
-              </a:spcAft>
-            </a:pPr>
-            <a:r>
-              <a:rPr sz="1500">
-                <a:solidFill>
-                  <a:srgbClr val="22282E"/>
-                </a:solidFill>
-              </a:rPr>
-              <a:t>•  Instalar GVM y ejecutar una tarea "Full and fast" contra la misma víctima, comparando tiempos de ejecución con Nessus.</a:t>
-            </a:r>
-          </a:p>
-          <a:p>
-            <a:pPr>
-              <a:spcAft>
-                <a:spcPts val="600"/>
-              </a:spcAft>
-            </a:pPr>
-            <a:r>
-              <a:rPr sz="1500">
-                <a:solidFill>
-                  <a:srgbClr val="22282E"/>
-                </a:solidFill>
-              </a:rPr>
-              <a:t>•  Tomar los cinco hallazgos "Critical" de Nessus, buscar su CVE en NVD y documentar el vector CVSS y el EPSS de cada uno.</a:t>
-            </a:r>
-          </a:p>
-          <a:p>
-            <a:pPr>
-              <a:spcAft>
-                <a:spcPts val="600"/>
-              </a:spcAft>
-            </a:pPr>
-            <a:r>
-              <a:rPr sz="1500">
-                <a:solidFill>
-                  <a:srgbClr val="22282E"/>
-                </a:solidFill>
-              </a:rPr>
-              <a:t>•  Identificar al menos un falso positivo en los resultados y justificar por escrito por qué no representa riesgo real.</a:t>
-            </a:r>
-          </a:p>
-          <a:p>
-            <a:pPr>
-              <a:spcAft>
-                <a:spcPts val="600"/>
-              </a:spcAft>
-            </a:pPr>
-            <a:r>
-              <a:rPr sz="1500">
-                <a:solidFill>
-                  <a:srgbClr val="22282E"/>
-                </a:solidFill>
-              </a:rPr>
-              <a:t>•  Redactar una tabla de priorización de remediación (Critical → Info) considerando explotabilidad (EPSS), exposición e impacto de negocio simulado.</a:t>
+              <a:t>•  Máquina atacante: Kali Linux o Parrot OS (VM), 4 GB RAM mínimo, red interna tipo "host-only" o "internal network" en VirtualBox/VMware — nunca conectada directamente a redes de producción o internet…</a:t>
+            </a:r>
+          </a:p>
+          <a:p>
+            <a:pPr>
+              <a:spcAft>
+                <a:spcPts val="600"/>
+              </a:spcAft>
+            </a:pPr>
+            <a:r>
+              <a:rPr sz="1500">
+                <a:solidFill>
+                  <a:srgbClr val="22282E"/>
+                </a:solidFill>
+              </a:rPr>
+              <a:t>•  Nessus Essentials: descargar desde tenable.com/products/nessus/nessus-essentials, registrar activation code gratuito (email), instalar .deb/.rpm según distro:</a:t>
+            </a:r>
+          </a:p>
+          <a:p>
+            <a:pPr>
+              <a:spcAft>
+                <a:spcPts val="600"/>
+              </a:spcAft>
+            </a:pPr>
+            <a:r>
+              <a:rPr sz="1500">
+                <a:solidFill>
+                  <a:srgbClr val="22282E"/>
+                </a:solidFill>
+              </a:rPr>
+              <a:t>•  OpenVAS/GVM: en Kali puede instalarse nativo o vía Docker. Nativo:</a:t>
+            </a:r>
+          </a:p>
+          <a:p>
+            <a:pPr>
+              <a:spcAft>
+                <a:spcPts val="600"/>
+              </a:spcAft>
+            </a:pPr>
+            <a:r>
+              <a:rPr sz="1500">
+                <a:solidFill>
+                  <a:srgbClr val="22282E"/>
+                </a:solidFill>
+              </a:rPr>
+              <a:t>•  Vía Docker: docker pull greenbone/gvm seguido de un docker-compose con los servicios gvmd, ospd-openvas, redis-server y notus-scanner.</a:t>
+            </a:r>
+          </a:p>
+          <a:p>
+            <a:pPr>
+              <a:spcAft>
+                <a:spcPts val="600"/>
+              </a:spcAft>
+            </a:pPr>
+            <a:r>
+              <a:rPr sz="1500">
+                <a:solidFill>
+                  <a:srgbClr val="22282E"/>
+                </a:solidFill>
+              </a:rPr>
+              <a:t>•  Máquinas víctima: Metasploitable2 y Metasploitable3 (VMs deliberadamente vulnerables de Rapid7), desplegadas en la misma red interna aislada.</a:t>
+            </a:r>
+          </a:p>
+          <a:p>
+            <a:pPr>
+              <a:spcAft>
+                <a:spcPts val="600"/>
+              </a:spcAft>
+            </a:pPr>
+            <a:r>
+              <a:rPr sz="1500">
+                <a:solidFill>
+                  <a:srgbClr val="22282E"/>
+                </a:solidFill>
+              </a:rPr>
+              <a:t>•  Complementos: nmap para descubrimiento previo, navegador para las consolas web de Nessus/GVM, cuenta de NVD (nvd.nist.gov) para consulta manual de CVEs.</a:t>
             </a:r>
           </a:p>
         </p:txBody>
@@ -4853,7 +5214,7 @@
                   <a:srgbClr val="0B3D2E"/>
                 </a:solidFill>
               </a:rPr>
-              <a:t>📝 Reto verificable</a:t>
+              <a:t>🧪 Laboratorio guiado</a:t>
             </a:r>
           </a:p>
         </p:txBody>
@@ -4891,22 +5252,97 @@
                   <a:srgbClr val="22282E"/>
                 </a:solidFill>
               </a:rPr>
-              <a:t>•  Reto: Ejecutar escaneos autenticados con Nessus y GVM contra Metasploitable2 y producir un informe consolidado que incluya: (a) total de hallazgos por severidad de cada herramienta, (b) al menos 5 CVEs verificados manualmente en NVD con su vector CVSS y EPSS, y (c) una tabla de priorización con al menos 3 hallazgos marcados como falso positivo con justificación.</a:t>
-            </a:r>
-          </a:p>
-          <a:p>
-            <a:pPr>
-              <a:spcAft>
-                <a:spcPts val="600"/>
-              </a:spcAft>
-            </a:pPr>
-            <a:r>
-              <a:rPr sz="1500">
-                <a:solidFill>
-                  <a:srgbClr val="22282E"/>
-                </a:solidFill>
-              </a:rPr>
-              <a:t>•  Criterio de aceptación: El informe debe listar como mínimo un hallazgo "Critical" (ej. vsftpd 2.3.4 backdoor, CVE-2011-2523) detectado por ambas herramientas, con su vector CVSS transcrito correctamente y una recomendación de remediación coherente con la solución sugerida por el escáner.</a:t>
+              <a:t>•  Levantar la red interna en el hipervisor y confirmar que Kali y Metasploitable2 están en el mismo segmento sin salida a producción: ip a en Kali, ping &lt;IP-metasploitable&gt;.</a:t>
+            </a:r>
+          </a:p>
+          <a:p>
+            <a:pPr>
+              <a:spcAft>
+                <a:spcPts val="600"/>
+              </a:spcAft>
+            </a:pPr>
+            <a:r>
+              <a:rPr sz="1500">
+                <a:solidFill>
+                  <a:srgbClr val="22282E"/>
+                </a:solidFill>
+              </a:rPr>
+              <a:t>•  Iniciar el servicio de Nessus (sudo systemctl start nessusd) y acceder a https://localhost:8834, completando el asistente con el activation code.</a:t>
+            </a:r>
+          </a:p>
+          <a:p>
+            <a:pPr>
+              <a:spcAft>
+                <a:spcPts val="600"/>
+              </a:spcAft>
+            </a:pPr>
+            <a:r>
+              <a:rPr sz="1500">
+                <a:solidFill>
+                  <a:srgbClr val="22282E"/>
+                </a:solidFill>
+              </a:rPr>
+              <a:t>•  Crear un nuevo escaneo: New Scan → Basic Network Scan, definir Name: Lab-Metasploitable2, Targets: 192.168.56.101 (IP de la víctima).</a:t>
+            </a:r>
+          </a:p>
+          <a:p>
+            <a:pPr>
+              <a:spcAft>
+                <a:spcPts val="600"/>
+              </a:spcAft>
+            </a:pPr>
+            <a:r>
+              <a:rPr sz="1500">
+                <a:solidFill>
+                  <a:srgbClr val="22282E"/>
+                </a:solidFill>
+              </a:rPr>
+              <a:t>•  Configurar credenciales SSH en la pestaña Credentials para habilitar escaneo autenticado (usuario msfadmin, contraseña msfadmin — credenciales por defecto documentadas de Metasploitable2).</a:t>
+            </a:r>
+          </a:p>
+          <a:p>
+            <a:pPr>
+              <a:spcAft>
+                <a:spcPts val="600"/>
+              </a:spcAft>
+            </a:pPr>
+            <a:r>
+              <a:rPr sz="1500">
+                <a:solidFill>
+                  <a:srgbClr val="22282E"/>
+                </a:solidFill>
+              </a:rPr>
+              <a:t>•  Lanzar el escaneo y esperar finalización; revisar el resumen por severidad (Critical/High/Medium/Low/Info).</a:t>
+            </a:r>
+          </a:p>
+          <a:p>
+            <a:pPr>
+              <a:spcAft>
+                <a:spcPts val="600"/>
+              </a:spcAft>
+            </a:pPr>
+            <a:r>
+              <a:rPr sz="1500">
+                <a:solidFill>
+                  <a:srgbClr val="22282E"/>
+                </a:solidFill>
+              </a:rPr>
+              <a:t>•  Abrir un hallazgo "Critical", leer el Synopsis, Description, Solution y el vector CVSS asociado (ej. AV:N/AC:L/PR:N/UI:N/S:U/C:H/I:H/A:H).</a:t>
+            </a:r>
+          </a:p>
+          <a:p>
+            <a:pPr>
+              <a:spcAft>
+                <a:spcPts val="600"/>
+              </a:spcAft>
+            </a:pPr>
+            <a:r>
+              <a:rPr sz="1500">
+                <a:solidFill>
+                  <a:srgbClr val="22282E"/>
+                </a:solidFill>
+              </a:rPr>
+              <a:t>•  Levantar GVM (sudo gvm-start o docker-compose up -d según la instalación) y esperar sincronización del feed comunitario (puede tardar horas la primera vez).</a:t>
             </a:r>
           </a:p>
         </p:txBody>
